--- a/EDA реєстру корупційних правопорушень НАЗК.pptx
+++ b/EDA реєстру корупційних правопорушень НАЗК.pptx
@@ -4715,6 +4715,56 @@
           </a:effectLst>
         </p:spPr>
       </p:pic>
+      <p:sp>
+        <p:nvSpPr>
+          <p:cNvPr id="2" name="Стрілка: вліво 1">
+            <a:hlinkClick r:id="rId8" action="ppaction://hlinksldjump"/>
+            <a:extLst>
+              <a:ext uri="{FF2B5EF4-FFF2-40B4-BE49-F238E27FC236}">
+                <a16:creationId xmlns:a16="http://schemas.microsoft.com/office/drawing/2014/main" id="{5CEB9217-47C5-4F33-75C6-FDEA98CE45DD}"/>
+              </a:ext>
+            </a:extLst>
+          </p:cNvPr>
+          <p:cNvSpPr/>
+          <p:nvPr/>
+        </p:nvSpPr>
+        <p:spPr>
+          <a:xfrm>
+            <a:off x="258092" y="6010275"/>
+            <a:ext cx="1952625" cy="661473"/>
+          </a:xfrm>
+          <a:prstGeom prst="leftArrow">
+            <a:avLst/>
+          </a:prstGeom>
+        </p:spPr>
+        <p:style>
+          <a:lnRef idx="2">
+            <a:schemeClr val="accent1">
+              <a:shade val="15000"/>
+            </a:schemeClr>
+          </a:lnRef>
+          <a:fillRef idx="1">
+            <a:schemeClr val="accent1"/>
+          </a:fillRef>
+          <a:effectRef idx="0">
+            <a:schemeClr val="accent1"/>
+          </a:effectRef>
+          <a:fontRef idx="minor">
+            <a:schemeClr val="lt1"/>
+          </a:fontRef>
+        </p:style>
+        <p:txBody>
+          <a:bodyPr rtlCol="0" anchor="ctr"/>
+          <a:lstStyle/>
+          <a:p>
+            <a:pPr algn="ctr"/>
+            <a:r>
+              <a:rPr lang="uk-UA" dirty="0"/>
+              <a:t>Повернутись</a:t>
+            </a:r>
+          </a:p>
+        </p:txBody>
+      </p:sp>
     </p:spTree>
     <p:extLst>
       <p:ext uri="{BB962C8B-B14F-4D97-AF65-F5344CB8AC3E}">
@@ -4981,7 +5031,7 @@
       <p:sp>
         <p:nvSpPr>
           <p:cNvPr id="3" name="Прямокутник: округлені кути 2">
-            <a:hlinkClick r:id="rId2"/>
+            <a:hlinkClick r:id="rId5" action="ppaction://hlinksldjump"/>
             <a:extLst>
               <a:ext uri="{FF2B5EF4-FFF2-40B4-BE49-F238E27FC236}">
                 <a16:creationId xmlns:a16="http://schemas.microsoft.com/office/drawing/2014/main" id="{C957C2AD-A84B-DEF6-CD44-88E3A55F95FF}"/>

--- a/EDA реєстру корупційних правопорушень НАЗК.pptx
+++ b/EDA реєстру корупційних правопорушень НАЗК.pptx
@@ -12,13 +12,14 @@
     <p:sldId id="260" r:id="rId6"/>
     <p:sldId id="261" r:id="rId7"/>
     <p:sldId id="262" r:id="rId8"/>
-    <p:sldId id="263" r:id="rId9"/>
-    <p:sldId id="264" r:id="rId10"/>
-    <p:sldId id="265" r:id="rId11"/>
-    <p:sldId id="266" r:id="rId12"/>
-    <p:sldId id="267" r:id="rId13"/>
-    <p:sldId id="268" r:id="rId14"/>
-    <p:sldId id="269" r:id="rId15"/>
+    <p:sldId id="270" r:id="rId9"/>
+    <p:sldId id="263" r:id="rId10"/>
+    <p:sldId id="264" r:id="rId11"/>
+    <p:sldId id="265" r:id="rId12"/>
+    <p:sldId id="266" r:id="rId13"/>
+    <p:sldId id="267" r:id="rId14"/>
+    <p:sldId id="268" r:id="rId15"/>
+    <p:sldId id="269" r:id="rId16"/>
   </p:sldIdLst>
   <p:sldSz cx="12192000" cy="6858000"/>
   <p:notesSz cx="6858000" cy="9144000"/>
@@ -3519,6 +3520,330 @@
           <p:cNvPr id="2" name="Заголовок 1">
             <a:extLst>
               <a:ext uri="{FF2B5EF4-FFF2-40B4-BE49-F238E27FC236}">
+                <a16:creationId xmlns:a16="http://schemas.microsoft.com/office/drawing/2014/main" id="{C41A9976-3BAC-7880-A7F3-793A2B037495}"/>
+              </a:ext>
+            </a:extLst>
+          </p:cNvPr>
+          <p:cNvSpPr>
+            <a:spLocks noGrp="1"/>
+          </p:cNvSpPr>
+          <p:nvPr>
+            <p:ph type="title"/>
+          </p:nvPr>
+        </p:nvSpPr>
+        <p:spPr>
+          <a:xfrm>
+            <a:off x="838200" y="54072"/>
+            <a:ext cx="10515600" cy="1325563"/>
+          </a:xfrm>
+        </p:spPr>
+        <p:txBody>
+          <a:bodyPr/>
+          <a:lstStyle/>
+          <a:p>
+            <a:r>
+              <a:rPr lang="uk-UA" dirty="0"/>
+              <a:t>Розподіл за регіонами</a:t>
+            </a:r>
+          </a:p>
+        </p:txBody>
+      </p:sp>
+      <p:pic>
+        <p:nvPicPr>
+          <p:cNvPr id="5" name="Рисунок 4">
+            <a:extLst>
+              <a:ext uri="{FF2B5EF4-FFF2-40B4-BE49-F238E27FC236}">
+                <a16:creationId xmlns:a16="http://schemas.microsoft.com/office/drawing/2014/main" id="{EF53AAD1-B8D6-5B70-A4DD-A9EAC9F351A5}"/>
+              </a:ext>
+            </a:extLst>
+          </p:cNvPr>
+          <p:cNvPicPr>
+            <a:picLocks noChangeAspect="1"/>
+          </p:cNvPicPr>
+          <p:nvPr/>
+        </p:nvPicPr>
+        <p:blipFill>
+          <a:blip r:embed="rId2"/>
+          <a:stretch>
+            <a:fillRect/>
+          </a:stretch>
+        </p:blipFill>
+        <p:spPr>
+          <a:xfrm>
+            <a:off x="561693" y="1371795"/>
+            <a:ext cx="6201145" cy="5116415"/>
+          </a:xfrm>
+          <a:prstGeom prst="rect">
+            <a:avLst/>
+          </a:prstGeom>
+        </p:spPr>
+      </p:pic>
+      <p:pic>
+        <p:nvPicPr>
+          <p:cNvPr id="9" name="Рисунок 8">
+            <a:extLst>
+              <a:ext uri="{FF2B5EF4-FFF2-40B4-BE49-F238E27FC236}">
+                <a16:creationId xmlns:a16="http://schemas.microsoft.com/office/drawing/2014/main" id="{625ABCF9-7FBB-F1B1-414B-90AF28D150B6}"/>
+              </a:ext>
+            </a:extLst>
+          </p:cNvPr>
+          <p:cNvPicPr>
+            <a:picLocks noChangeAspect="1"/>
+          </p:cNvPicPr>
+          <p:nvPr/>
+        </p:nvPicPr>
+        <p:blipFill>
+          <a:blip r:embed="rId3"/>
+          <a:stretch>
+            <a:fillRect/>
+          </a:stretch>
+        </p:blipFill>
+        <p:spPr>
+          <a:xfrm>
+            <a:off x="7221480" y="3124850"/>
+            <a:ext cx="4408827" cy="3581783"/>
+          </a:xfrm>
+          <a:prstGeom prst="rect">
+            <a:avLst/>
+          </a:prstGeom>
+        </p:spPr>
+      </p:pic>
+      <p:sp>
+        <p:nvSpPr>
+          <p:cNvPr id="3" name="TextBox 2">
+            <a:extLst>
+              <a:ext uri="{FF2B5EF4-FFF2-40B4-BE49-F238E27FC236}">
+                <a16:creationId xmlns:a16="http://schemas.microsoft.com/office/drawing/2014/main" id="{C8B895FC-E58F-CBBE-B315-C008061B0770}"/>
+              </a:ext>
+            </a:extLst>
+          </p:cNvPr>
+          <p:cNvSpPr txBox="1"/>
+          <p:nvPr/>
+        </p:nvSpPr>
+        <p:spPr>
+          <a:xfrm>
+            <a:off x="7039345" y="1124340"/>
+            <a:ext cx="4923459" cy="2123658"/>
+          </a:xfrm>
+          <a:prstGeom prst="rect">
+            <a:avLst/>
+          </a:prstGeom>
+          <a:noFill/>
+        </p:spPr>
+        <p:txBody>
+          <a:bodyPr wrap="square" rtlCol="0">
+            <a:spAutoFit/>
+          </a:bodyPr>
+          <a:lstStyle/>
+          <a:p>
+            <a:r>
+              <a:rPr lang="uk-UA" sz="1200" b="1" dirty="0"/>
+              <a:t>Місце правопорушення ≠ Місце розгляду справи</a:t>
+            </a:r>
+          </a:p>
+          <a:p>
+            <a:r>
+              <a:rPr lang="uk-UA" sz="1200" b="1" dirty="0"/>
+              <a:t>Кількість справ ≠ Рівень корупції</a:t>
+            </a:r>
+          </a:p>
+          <a:p>
+            <a:r>
+              <a:rPr lang="uk-UA" sz="1200" dirty="0"/>
+              <a:t>Дані відображають роботу системи правосуддя по областях, а не рівень корупції</a:t>
+            </a:r>
+          </a:p>
+          <a:p>
+            <a:pPr marL="342900" marR="0" lvl="0" indent="-342900" algn="l" defTabSz="914400" rtl="0" eaLnBrk="0" fontAlgn="base" latinLnBrk="0" hangingPunct="0">
+              <a:lnSpc>
+                <a:spcPct val="100000"/>
+              </a:lnSpc>
+              <a:spcBef>
+                <a:spcPct val="0"/>
+              </a:spcBef>
+              <a:spcAft>
+                <a:spcPct val="0"/>
+              </a:spcAft>
+              <a:buClrTx/>
+              <a:buSzTx/>
+              <a:buFont typeface="+mj-lt"/>
+              <a:buAutoNum type="arabicPeriod"/>
+              <a:tabLst/>
+            </a:pPr>
+            <a:r>
+              <a:rPr kumimoji="0" lang="uk-UA" altLang="uk-UA" sz="1200" i="0" u="none" strike="noStrike" cap="none" normalizeH="0" baseline="0" dirty="0">
+                <a:ln>
+                  <a:noFill/>
+                </a:ln>
+                <a:solidFill>
+                  <a:schemeClr val="tx1"/>
+                </a:solidFill>
+                <a:effectLst/>
+                <a:latin typeface="Arial" panose="020B0604020202020204" pitchFamily="34" charset="0"/>
+              </a:rPr>
+              <a:t>Найбільше корупційних справ фіксується у великих адміністративних та економічних регіонах.</a:t>
+            </a:r>
+          </a:p>
+          <a:p>
+            <a:pPr marL="342900" marR="0" lvl="0" indent="-342900" algn="l" defTabSz="914400" rtl="0" eaLnBrk="0" fontAlgn="base" latinLnBrk="0" hangingPunct="0">
+              <a:lnSpc>
+                <a:spcPct val="100000"/>
+              </a:lnSpc>
+              <a:spcBef>
+                <a:spcPct val="0"/>
+              </a:spcBef>
+              <a:spcAft>
+                <a:spcPct val="0"/>
+              </a:spcAft>
+              <a:buClrTx/>
+              <a:buSzTx/>
+              <a:buFont typeface="+mj-lt"/>
+              <a:buAutoNum type="arabicPeriod"/>
+              <a:tabLst/>
+            </a:pPr>
+            <a:r>
+              <a:rPr kumimoji="0" lang="uk-UA" altLang="uk-UA" sz="1200" i="0" u="none" strike="noStrike" cap="none" normalizeH="0" baseline="0" dirty="0">
+                <a:ln>
+                  <a:noFill/>
+                </a:ln>
+                <a:solidFill>
+                  <a:schemeClr val="tx1"/>
+                </a:solidFill>
+                <a:effectLst/>
+                <a:latin typeface="Arial" panose="020B0604020202020204" pitchFamily="34" charset="0"/>
+              </a:rPr>
+              <a:t>Київський регіон найбільший центр корупційних проваджень.</a:t>
+            </a:r>
+          </a:p>
+          <a:p>
+            <a:pPr marL="342900" marR="0" lvl="0" indent="-342900" algn="l" defTabSz="914400" rtl="0" eaLnBrk="0" fontAlgn="base" latinLnBrk="0" hangingPunct="0">
+              <a:lnSpc>
+                <a:spcPct val="100000"/>
+              </a:lnSpc>
+              <a:spcBef>
+                <a:spcPct val="0"/>
+              </a:spcBef>
+              <a:spcAft>
+                <a:spcPct val="0"/>
+              </a:spcAft>
+              <a:buClrTx/>
+              <a:buSzTx/>
+              <a:buFont typeface="+mj-lt"/>
+              <a:buAutoNum type="arabicPeriod"/>
+              <a:tabLst/>
+            </a:pPr>
+            <a:r>
+              <a:rPr kumimoji="0" lang="uk-UA" altLang="uk-UA" sz="1200" i="0" u="none" strike="noStrike" cap="none" normalizeH="0" baseline="0" dirty="0">
+                <a:ln>
+                  <a:noFill/>
+                </a:ln>
+                <a:solidFill>
+                  <a:schemeClr val="tx1"/>
+                </a:solidFill>
+                <a:effectLst/>
+                <a:latin typeface="Arial" panose="020B0604020202020204" pitchFamily="34" charset="0"/>
+              </a:rPr>
+              <a:t>Частина менших областей має непропорційно високу частку справ, що може вказувати на активніші розслідування.</a:t>
+            </a:r>
+          </a:p>
+          <a:p>
+            <a:pPr marL="342900" marR="0" lvl="0" indent="-342900" algn="l" defTabSz="914400" rtl="0" eaLnBrk="0" fontAlgn="base" latinLnBrk="0" hangingPunct="0">
+              <a:lnSpc>
+                <a:spcPct val="100000"/>
+              </a:lnSpc>
+              <a:spcBef>
+                <a:spcPct val="0"/>
+              </a:spcBef>
+              <a:spcAft>
+                <a:spcPct val="0"/>
+              </a:spcAft>
+              <a:buClrTx/>
+              <a:buSzTx/>
+              <a:buFont typeface="+mj-lt"/>
+              <a:buAutoNum type="arabicPeriod"/>
+              <a:tabLst/>
+            </a:pPr>
+            <a:r>
+              <a:rPr kumimoji="0" lang="uk-UA" altLang="uk-UA" sz="1200" i="0" u="none" strike="noStrike" cap="none" normalizeH="0" baseline="0" dirty="0">
+                <a:ln>
+                  <a:noFill/>
+                </a:ln>
+                <a:solidFill>
+                  <a:schemeClr val="tx1"/>
+                </a:solidFill>
+                <a:effectLst/>
+                <a:latin typeface="Arial" panose="020B0604020202020204" pitchFamily="34" charset="0"/>
+              </a:rPr>
+              <a:t>10% справ без географії - важливе обмеження </a:t>
+            </a:r>
+            <a:r>
+              <a:rPr kumimoji="0" lang="uk-UA" altLang="uk-UA" sz="1200" i="0" u="none" strike="noStrike" cap="none" normalizeH="0" baseline="0" dirty="0" err="1">
+                <a:ln>
+                  <a:noFill/>
+                </a:ln>
+                <a:solidFill>
+                  <a:schemeClr val="tx1"/>
+                </a:solidFill>
+                <a:effectLst/>
+                <a:latin typeface="Arial" panose="020B0604020202020204" pitchFamily="34" charset="0"/>
+              </a:rPr>
+              <a:t>датасету</a:t>
+            </a:r>
+            <a:r>
+              <a:rPr kumimoji="0" lang="uk-UA" altLang="uk-UA" sz="1200" i="0" u="none" strike="noStrike" cap="none" normalizeH="0" baseline="0" dirty="0">
+                <a:ln>
+                  <a:noFill/>
+                </a:ln>
+                <a:solidFill>
+                  <a:schemeClr val="tx1"/>
+                </a:solidFill>
+                <a:effectLst/>
+                <a:latin typeface="Arial" panose="020B0604020202020204" pitchFamily="34" charset="0"/>
+              </a:rPr>
+              <a:t>.</a:t>
+            </a:r>
+            <a:endParaRPr lang="uk-UA" sz="1200" dirty="0"/>
+          </a:p>
+          <a:p>
+            <a:endParaRPr lang="uk-UA" sz="1200" dirty="0"/>
+          </a:p>
+        </p:txBody>
+      </p:sp>
+    </p:spTree>
+    <p:extLst>
+      <p:ext uri="{BB962C8B-B14F-4D97-AF65-F5344CB8AC3E}">
+        <p14:creationId xmlns:p14="http://schemas.microsoft.com/office/powerpoint/2010/main" val="1598815601"/>
+      </p:ext>
+    </p:extLst>
+  </p:cSld>
+  <p:clrMapOvr>
+    <a:masterClrMapping/>
+  </p:clrMapOvr>
+</p:sld>
+</file>
+
+<file path=ppt/slides/slide11.xml><?xml version="1.0" encoding="utf-8"?>
+<p:sld xmlns:a="http://schemas.openxmlformats.org/drawingml/2006/main" xmlns:r="http://schemas.openxmlformats.org/officeDocument/2006/relationships" xmlns:p="http://schemas.openxmlformats.org/presentationml/2006/main">
+  <p:cSld>
+    <p:spTree>
+      <p:nvGrpSpPr>
+        <p:cNvPr id="1" name=""/>
+        <p:cNvGrpSpPr/>
+        <p:nvPr/>
+      </p:nvGrpSpPr>
+      <p:grpSpPr>
+        <a:xfrm>
+          <a:off x="0" y="0"/>
+          <a:ext cx="0" cy="0"/>
+          <a:chOff x="0" y="0"/>
+          <a:chExt cx="0" cy="0"/>
+        </a:xfrm>
+      </p:grpSpPr>
+      <p:sp>
+        <p:nvSpPr>
+          <p:cNvPr id="2" name="Заголовок 1">
+            <a:extLst>
+              <a:ext uri="{FF2B5EF4-FFF2-40B4-BE49-F238E27FC236}">
                 <a16:creationId xmlns:a16="http://schemas.microsoft.com/office/drawing/2014/main" id="{2518039B-DC35-47F1-2A96-35A53C777BC2}"/>
               </a:ext>
             </a:extLst>
@@ -3585,7 +3910,7 @@
 </p:sld>
 </file>
 
-<file path=ppt/slides/slide11.xml><?xml version="1.0" encoding="utf-8"?>
+<file path=ppt/slides/slide12.xml><?xml version="1.0" encoding="utf-8"?>
 <p:sld xmlns:a="http://schemas.openxmlformats.org/drawingml/2006/main" xmlns:r="http://schemas.openxmlformats.org/officeDocument/2006/relationships" xmlns:p="http://schemas.openxmlformats.org/presentationml/2006/main">
   <p:cSld>
     <p:spTree>
@@ -3672,7 +3997,7 @@
 </p:sld>
 </file>
 
-<file path=ppt/slides/slide12.xml><?xml version="1.0" encoding="utf-8"?>
+<file path=ppt/slides/slide13.xml><?xml version="1.0" encoding="utf-8"?>
 <p:sld xmlns:a="http://schemas.openxmlformats.org/drawingml/2006/main" xmlns:r="http://schemas.openxmlformats.org/officeDocument/2006/relationships" xmlns:p="http://schemas.openxmlformats.org/presentationml/2006/main">
   <p:cSld>
     <p:spTree>
@@ -3777,7 +4102,7 @@
 </p:sld>
 </file>
 
-<file path=ppt/slides/slide13.xml><?xml version="1.0" encoding="utf-8"?>
+<file path=ppt/slides/slide14.xml><?xml version="1.0" encoding="utf-8"?>
 <p:sld xmlns:a="http://schemas.openxmlformats.org/drawingml/2006/main" xmlns:r="http://schemas.openxmlformats.org/officeDocument/2006/relationships" xmlns:p="http://schemas.openxmlformats.org/presentationml/2006/main">
   <p:cSld>
     <p:spTree>
@@ -3836,8 +4161,8 @@
         </p:nvSpPr>
         <p:spPr>
           <a:xfrm>
-            <a:off x="666750" y="1828800"/>
-            <a:ext cx="10687050" cy="5909310"/>
+            <a:off x="666750" y="1690688"/>
+            <a:ext cx="10687050" cy="4524315"/>
           </a:xfrm>
           <a:prstGeom prst="rect">
             <a:avLst/>
@@ -3850,606 +4175,159 @@
           </a:bodyPr>
           <a:lstStyle/>
           <a:p>
-            <a:pPr marL="342900" indent="-342900">
+            <a:pPr marL="342900" indent="-342900" algn="just">
               <a:buFont typeface="+mj-lt"/>
               <a:buAutoNum type="arabicPeriod"/>
             </a:pPr>
             <a:r>
-              <a:rPr lang="uk-UA" dirty="0"/>
-              <a:t>Реєстр дає значну вибірку для аналізу типів рішень, видів покарань, регіонів і динаміки в часі.</a:t>
-            </a:r>
-            <a:endParaRPr lang="en-US" dirty="0"/>
-          </a:p>
-          <a:p>
-            <a:pPr marL="342900" indent="-342900">
+              <a:rPr lang="uk-UA" sz="1600" dirty="0"/>
+              <a:t>Реєстр судових рішень формує достатньо велику вибірку для аналізу типів рішень, видів санкцій, регіонального розподілу та часової динаміки корупційних справ.</a:t>
+            </a:r>
+            <a:endParaRPr lang="en-US" sz="1600" dirty="0"/>
+          </a:p>
+          <a:p>
+            <a:pPr marL="342900" indent="-342900" algn="just">
               <a:buFont typeface="+mj-lt"/>
               <a:buAutoNum type="arabicPeriod"/>
             </a:pPr>
             <a:r>
-              <a:rPr lang="ru-RU" dirty="0"/>
-              <a:t>Для </a:t>
-            </a:r>
-            <a:r>
-              <a:rPr lang="ru-RU" dirty="0" err="1"/>
-              <a:t>аналізу</a:t>
-            </a:r>
-            <a:r>
-              <a:rPr lang="ru-RU" dirty="0"/>
-              <a:t> </a:t>
-            </a:r>
-            <a:r>
-              <a:rPr lang="ru-RU" dirty="0" err="1"/>
-              <a:t>покарань</a:t>
-            </a:r>
-            <a:r>
-              <a:rPr lang="ru-RU" dirty="0"/>
-              <a:t>, </a:t>
-            </a:r>
-            <a:r>
-              <a:rPr lang="ru-RU" dirty="0" err="1"/>
-              <a:t>типів</a:t>
-            </a:r>
-            <a:r>
-              <a:rPr lang="ru-RU" dirty="0"/>
-              <a:t> </a:t>
-            </a:r>
-            <a:r>
-              <a:rPr lang="ru-RU" dirty="0" err="1"/>
-              <a:t>рішень</a:t>
-            </a:r>
-            <a:r>
-              <a:rPr lang="ru-RU" dirty="0"/>
-              <a:t> і </a:t>
-            </a:r>
-            <a:r>
-              <a:rPr lang="ru-RU" dirty="0" err="1"/>
-              <a:t>регіонів</a:t>
-            </a:r>
-            <a:r>
-              <a:rPr lang="ru-RU" dirty="0"/>
-              <a:t> </a:t>
-            </a:r>
-            <a:r>
-              <a:rPr lang="ru-RU" dirty="0" err="1"/>
-              <a:t>якість</a:t>
-            </a:r>
-            <a:r>
-              <a:rPr lang="ru-RU" dirty="0"/>
-              <a:t> </a:t>
-            </a:r>
-            <a:r>
-              <a:rPr lang="ru-RU" dirty="0" err="1"/>
-              <a:t>даних</a:t>
-            </a:r>
-            <a:r>
-              <a:rPr lang="ru-RU" dirty="0"/>
-              <a:t> </a:t>
-            </a:r>
-            <a:r>
-              <a:rPr lang="ru-RU" dirty="0" err="1"/>
-              <a:t>достатня</a:t>
-            </a:r>
-            <a:r>
-              <a:rPr lang="ru-RU" dirty="0"/>
-              <a:t>; для адресного та </a:t>
-            </a:r>
-            <a:r>
-              <a:rPr lang="ru-RU" dirty="0" err="1"/>
-              <a:t>організаційного</a:t>
-            </a:r>
-            <a:r>
-              <a:rPr lang="ru-RU" dirty="0"/>
-              <a:t> </a:t>
-            </a:r>
-            <a:r>
-              <a:rPr lang="ru-RU" dirty="0" err="1"/>
-              <a:t>аналізу</a:t>
-            </a:r>
-            <a:r>
-              <a:rPr lang="ru-RU" dirty="0"/>
-              <a:t> </a:t>
-            </a:r>
-            <a:r>
-              <a:rPr lang="ru-RU" dirty="0" err="1"/>
-              <a:t>потрібно</a:t>
-            </a:r>
-            <a:r>
-              <a:rPr lang="ru-RU" dirty="0"/>
-              <a:t> </a:t>
-            </a:r>
-            <a:r>
-              <a:rPr lang="ru-RU" dirty="0" err="1"/>
-              <a:t>враховувати</a:t>
-            </a:r>
-            <a:r>
-              <a:rPr lang="ru-RU" dirty="0"/>
-              <a:t> </a:t>
-            </a:r>
-            <a:r>
-              <a:rPr lang="ru-RU" dirty="0" err="1"/>
-              <a:t>високий</a:t>
-            </a:r>
-            <a:r>
-              <a:rPr lang="ru-RU" dirty="0"/>
-              <a:t> </a:t>
-            </a:r>
-            <a:r>
-              <a:rPr lang="ru-RU" dirty="0" err="1"/>
-              <a:t>рівень</a:t>
-            </a:r>
-            <a:r>
-              <a:rPr lang="ru-RU" dirty="0"/>
-              <a:t> </a:t>
-            </a:r>
-            <a:r>
-              <a:rPr lang="ru-RU" dirty="0" err="1"/>
-              <a:t>пропусків</a:t>
-            </a:r>
-            <a:r>
-              <a:rPr lang="ru-RU" dirty="0"/>
-              <a:t>.</a:t>
-            </a:r>
-          </a:p>
-          <a:p>
-            <a:pPr marL="342900" indent="-342900">
+              <a:rPr lang="uk-UA" sz="1600" dirty="0"/>
+              <a:t>Якість даних є достатньою для агрегованого аналізу типів рішень, санкцій і регіонів. Водночас для більш деталізованого аналізу (конкретні органи влади, адреси, установи) існує значна частка пропущених значень, що обмежує точність висновків. </a:t>
+            </a:r>
+          </a:p>
+          <a:p>
+            <a:pPr marL="342900" indent="-342900" algn="just">
               <a:buFont typeface="+mj-lt"/>
               <a:buAutoNum type="arabicPeriod"/>
             </a:pPr>
             <a:r>
-              <a:rPr lang="uk-UA" dirty="0"/>
-              <a:t>Переважна більшість записів у реєстрі — саме судові рішення; дисциплінарні стягнення становлять меншу, але помітну частку.</a:t>
-            </a:r>
-          </a:p>
-          <a:p>
-            <a:pPr marL="342900" indent="-342900">
+              <a:rPr lang="uk-UA" sz="1600" dirty="0"/>
+              <a:t>Переважна частка записів у вибірці стосується судових рішень у корупційних справах, тоді як дисциплінарні стягнення формують меншу, але помітну частку.</a:t>
+            </a:r>
+          </a:p>
+          <a:p>
+            <a:pPr marL="342900" indent="-342900" algn="just" rtl="0">
               <a:buFont typeface="+mj-lt"/>
               <a:buAutoNum type="arabicPeriod"/>
             </a:pPr>
             <a:r>
-              <a:rPr lang="uk-UA" dirty="0"/>
-              <a:t>В основному покаранням постає тип «Штраф» - 56,5% від загальної </a:t>
-            </a:r>
-            <a:r>
-              <a:rPr lang="uk-UA" dirty="0" err="1"/>
-              <a:t>кіллькості</a:t>
-            </a:r>
-            <a:r>
-              <a:rPr lang="uk-UA" dirty="0"/>
+              <a:rPr lang="uk-UA" sz="1600" dirty="0"/>
+              <a:t>Згідно статистики рейтингу основних статей, </a:t>
+            </a:r>
+            <a:r>
+              <a:rPr lang="ru-RU" sz="1600" dirty="0" err="1"/>
+              <a:t>можна</a:t>
+            </a:r>
+            <a:r>
+              <a:rPr lang="ru-RU" sz="1600" dirty="0"/>
               <a:t> </a:t>
             </a:r>
             <a:r>
-              <a:rPr lang="uk-UA" dirty="0" err="1"/>
-              <a:t>вироків</a:t>
-            </a:r>
-            <a:endParaRPr lang="uk-UA" dirty="0"/>
-          </a:p>
-          <a:p>
-            <a:pPr marL="342900" indent="-342900" rtl="0">
+              <a:rPr lang="ru-RU" sz="1600" dirty="0" err="1"/>
+              <a:t>зробити</a:t>
+            </a:r>
+            <a:r>
+              <a:rPr lang="ru-RU" sz="1600" dirty="0"/>
+              <a:t> </a:t>
+            </a:r>
+            <a:r>
+              <a:rPr lang="ru-RU" sz="1600" dirty="0" err="1"/>
+              <a:t>припущення</a:t>
+            </a:r>
+            <a:r>
+              <a:rPr lang="ru-RU" sz="1600" dirty="0"/>
+              <a:t> про </a:t>
+            </a:r>
+            <a:r>
+              <a:rPr lang="ru-RU" sz="1600" dirty="0" err="1"/>
+              <a:t>домінування</a:t>
+            </a:r>
+            <a:r>
+              <a:rPr lang="ru-RU" sz="1600" dirty="0"/>
+              <a:t> </a:t>
+            </a:r>
+            <a:r>
+              <a:rPr lang="ru-RU" sz="1600" dirty="0" err="1"/>
+              <a:t>транзакційних</a:t>
+            </a:r>
+            <a:r>
+              <a:rPr lang="ru-RU" sz="1600" dirty="0"/>
+              <a:t> форм </a:t>
+            </a:r>
+            <a:r>
+              <a:rPr lang="ru-RU" sz="1600" dirty="0" err="1"/>
+              <a:t>корупції</a:t>
+            </a:r>
+            <a:r>
+              <a:rPr lang="ru-RU" sz="1600" dirty="0"/>
+              <a:t> та </a:t>
+            </a:r>
+            <a:r>
+              <a:rPr lang="ru-RU" sz="1600" dirty="0" err="1"/>
+              <a:t>процедурних</a:t>
+            </a:r>
+            <a:r>
+              <a:rPr lang="ru-RU" sz="1600" dirty="0"/>
+              <a:t> </a:t>
+            </a:r>
+            <a:r>
+              <a:rPr lang="ru-RU" sz="1600" dirty="0" err="1"/>
+              <a:t>порушень</a:t>
+            </a:r>
+            <a:r>
+              <a:rPr lang="ru-RU" sz="1600" dirty="0"/>
+              <a:t> у </a:t>
+            </a:r>
+            <a:r>
+              <a:rPr lang="ru-RU" sz="1600" dirty="0" err="1"/>
+              <a:t>сфері</a:t>
+            </a:r>
+            <a:r>
+              <a:rPr lang="ru-RU" sz="1600" dirty="0"/>
+              <a:t> </a:t>
+            </a:r>
+            <a:r>
+              <a:rPr lang="ru-RU" sz="1600" dirty="0" err="1"/>
+              <a:t>декларування</a:t>
+            </a:r>
+            <a:r>
+              <a:rPr lang="ru-RU" sz="1600" dirty="0"/>
+              <a:t>.</a:t>
+            </a:r>
+            <a:r>
+              <a:rPr lang="uk-UA" sz="1600" dirty="0"/>
+              <a:t> </a:t>
+            </a:r>
+          </a:p>
+          <a:p>
+            <a:pPr marL="342900" indent="-342900" algn="just">
               <a:buFont typeface="+mj-lt"/>
               <a:buAutoNum type="arabicPeriod"/>
             </a:pPr>
             <a:r>
-              <a:rPr lang="uk-UA" dirty="0"/>
-              <a:t>Основні статті кодексу: Пропозиція/прийняття, обіцянка або надання неправомірної вигоди службовій особі та Порушення вимог фінансового контролю)</a:t>
-            </a:r>
-          </a:p>
-          <a:p>
-            <a:pPr marL="342900" indent="-342900">
+              <a:rPr lang="uk-UA" sz="1600" dirty="0"/>
+              <a:t>Спостерігається помітна регіональна нерівномірність у кількості справ. Частина областей має значно більшу кількість записів у реєстрі. Це може бути пов’язано як з різною інтенсивністю корупційних практик, так і з відмінностями у роботі правоохоронних органів, судів або щільності населення.</a:t>
+            </a:r>
+          </a:p>
+          <a:p>
+            <a:pPr marL="342900" indent="-342900" algn="just">
               <a:buFont typeface="+mj-lt"/>
               <a:buAutoNum type="arabicPeriod"/>
             </a:pPr>
             <a:r>
-              <a:rPr lang="ru-RU" dirty="0"/>
-              <a:t>Є </a:t>
-            </a:r>
-            <a:r>
-              <a:rPr lang="ru-RU" dirty="0" err="1"/>
-              <a:t>регіональна</a:t>
-            </a:r>
-            <a:r>
-              <a:rPr lang="ru-RU" dirty="0"/>
-              <a:t> </a:t>
-            </a:r>
-            <a:r>
-              <a:rPr lang="ru-RU" dirty="0" err="1"/>
-              <a:t>нерівномірність</a:t>
-            </a:r>
-            <a:r>
-              <a:rPr lang="ru-RU" dirty="0"/>
-              <a:t>: </a:t>
-            </a:r>
-            <a:r>
-              <a:rPr lang="ru-RU" dirty="0" err="1"/>
-              <a:t>частина</a:t>
-            </a:r>
-            <a:r>
-              <a:rPr lang="ru-RU" dirty="0"/>
-              <a:t> областей </a:t>
-            </a:r>
-            <a:r>
-              <a:rPr lang="ru-RU" dirty="0" err="1"/>
-              <a:t>має</a:t>
-            </a:r>
-            <a:r>
-              <a:rPr lang="ru-RU" dirty="0"/>
-              <a:t> </a:t>
-            </a:r>
-            <a:r>
-              <a:rPr lang="ru-RU" dirty="0" err="1"/>
-              <a:t>значно</a:t>
-            </a:r>
-            <a:r>
-              <a:rPr lang="ru-RU" dirty="0"/>
-              <a:t> </a:t>
-            </a:r>
-            <a:r>
-              <a:rPr lang="ru-RU" dirty="0" err="1"/>
-              <a:t>більше</a:t>
-            </a:r>
-            <a:r>
-              <a:rPr lang="ru-RU" dirty="0"/>
-              <a:t> </a:t>
-            </a:r>
-            <a:r>
-              <a:rPr lang="ru-RU" dirty="0" err="1"/>
-              <a:t>записів</a:t>
-            </a:r>
-            <a:r>
-              <a:rPr lang="ru-RU" dirty="0"/>
-              <a:t>. Теплова карта також </a:t>
-            </a:r>
-            <a:r>
-              <a:rPr lang="ru-RU" dirty="0" err="1"/>
-              <a:t>покарання</a:t>
-            </a:r>
-            <a:r>
-              <a:rPr lang="ru-RU" dirty="0"/>
-              <a:t> </a:t>
-            </a:r>
-            <a:r>
-              <a:rPr lang="ru-RU" dirty="0" err="1"/>
-              <a:t>показує</a:t>
-            </a:r>
-            <a:r>
-              <a:rPr lang="ru-RU" dirty="0"/>
-              <a:t>, де </a:t>
-            </a:r>
-            <a:r>
-              <a:rPr lang="ru-RU" dirty="0" err="1"/>
-              <a:t>переважають</a:t>
-            </a:r>
-            <a:r>
-              <a:rPr lang="ru-RU" dirty="0"/>
-              <a:t> </a:t>
-            </a:r>
-            <a:r>
-              <a:rPr lang="ru-RU" dirty="0" err="1"/>
-              <a:t>певні</a:t>
-            </a:r>
-            <a:r>
-              <a:rPr lang="ru-RU" dirty="0"/>
-              <a:t> </a:t>
-            </a:r>
-            <a:r>
-              <a:rPr lang="ru-RU" dirty="0" err="1"/>
-              <a:t>види</a:t>
-            </a:r>
-            <a:r>
-              <a:rPr lang="ru-RU" dirty="0"/>
-              <a:t> </a:t>
-            </a:r>
-            <a:r>
-              <a:rPr lang="ru-RU" dirty="0" err="1"/>
-              <a:t>санкцій</a:t>
-            </a:r>
-            <a:r>
-              <a:rPr lang="ru-RU" dirty="0"/>
-              <a:t>.</a:t>
-            </a:r>
-          </a:p>
-          <a:p>
-            <a:pPr marL="342900" indent="-342900">
+              <a:rPr lang="uk-UA" sz="1600" dirty="0"/>
+              <a:t>Аналіз динаміки за роками демонструє періоди зростання та зниження кількості рішень. Такі зміни можуть бути пов’язані із законодавчими реформами, змінами у практиці антикорупційних органів (зокрема НАЗК), а також з повнотою наповнення реєстру.</a:t>
+            </a:r>
+          </a:p>
+          <a:p>
+            <a:pPr marL="342900" indent="-342900" algn="just">
               <a:buFont typeface="+mj-lt"/>
               <a:buAutoNum type="arabicPeriod"/>
             </a:pPr>
             <a:r>
-              <a:rPr lang="ru-RU" dirty="0"/>
-              <a:t>За роками видно </a:t>
-            </a:r>
-            <a:r>
-              <a:rPr lang="ru-RU" dirty="0" err="1"/>
-              <a:t>зростання</a:t>
-            </a:r>
-            <a:r>
-              <a:rPr lang="ru-RU" dirty="0"/>
-              <a:t> </a:t>
-            </a:r>
-            <a:r>
-              <a:rPr lang="ru-RU" dirty="0" err="1"/>
-              <a:t>або</a:t>
-            </a:r>
-            <a:r>
-              <a:rPr lang="ru-RU" dirty="0"/>
-              <a:t> </a:t>
-            </a:r>
-            <a:r>
-              <a:rPr lang="ru-RU" dirty="0" err="1"/>
-              <a:t>зниження</a:t>
-            </a:r>
-            <a:r>
-              <a:rPr lang="ru-RU" dirty="0"/>
-              <a:t> </a:t>
-            </a:r>
-            <a:r>
-              <a:rPr lang="ru-RU" dirty="0" err="1"/>
-              <a:t>кількості</a:t>
-            </a:r>
-            <a:r>
-              <a:rPr lang="ru-RU" dirty="0"/>
-              <a:t> </a:t>
-            </a:r>
-            <a:r>
-              <a:rPr lang="ru-RU" dirty="0" err="1"/>
-              <a:t>рішень</a:t>
-            </a:r>
-            <a:r>
-              <a:rPr lang="ru-RU" dirty="0"/>
-              <a:t>; </a:t>
-            </a:r>
-            <a:r>
-              <a:rPr lang="ru-RU" dirty="0" err="1"/>
-              <a:t>це</a:t>
-            </a:r>
-            <a:r>
-              <a:rPr lang="ru-RU" dirty="0"/>
-              <a:t> </a:t>
-            </a:r>
-            <a:r>
-              <a:rPr lang="ru-RU" dirty="0" err="1"/>
-              <a:t>можна</a:t>
-            </a:r>
-            <a:r>
-              <a:rPr lang="ru-RU" dirty="0"/>
-              <a:t> </a:t>
-            </a:r>
-            <a:r>
-              <a:rPr lang="ru-RU" dirty="0" err="1"/>
-              <a:t>пов’язати</a:t>
-            </a:r>
-            <a:r>
-              <a:rPr lang="ru-RU" dirty="0"/>
-              <a:t> з </a:t>
-            </a:r>
-            <a:r>
-              <a:rPr lang="ru-RU" dirty="0" err="1"/>
-              <a:t>зміною</a:t>
-            </a:r>
-            <a:r>
-              <a:rPr lang="ru-RU" dirty="0"/>
-              <a:t> </a:t>
-            </a:r>
-            <a:r>
-              <a:rPr lang="ru-RU" dirty="0" err="1"/>
-              <a:t>законодавства</a:t>
-            </a:r>
-            <a:r>
-              <a:rPr lang="ru-RU" dirty="0"/>
-              <a:t>, практики НАЗК та </a:t>
-            </a:r>
-            <a:r>
-              <a:rPr lang="ru-RU" dirty="0" err="1"/>
-              <a:t>судів</a:t>
-            </a:r>
-            <a:r>
-              <a:rPr lang="ru-RU" dirty="0"/>
-              <a:t>, </a:t>
-            </a:r>
-            <a:r>
-              <a:rPr lang="ru-RU" dirty="0" err="1"/>
-              <a:t>або</a:t>
-            </a:r>
-            <a:r>
-              <a:rPr lang="ru-RU" dirty="0"/>
-              <a:t> </a:t>
-            </a:r>
-            <a:r>
-              <a:rPr lang="ru-RU" dirty="0" err="1"/>
-              <a:t>зміною</a:t>
-            </a:r>
-            <a:r>
-              <a:rPr lang="ru-RU" dirty="0"/>
-              <a:t> </a:t>
-            </a:r>
-            <a:r>
-              <a:rPr lang="ru-RU" dirty="0" err="1"/>
-              <a:t>повноти</a:t>
-            </a:r>
-            <a:r>
-              <a:rPr lang="ru-RU" dirty="0"/>
-              <a:t> </a:t>
-            </a:r>
-            <a:r>
-              <a:rPr lang="ru-RU" dirty="0" err="1"/>
-              <a:t>реєстру</a:t>
-            </a:r>
-            <a:r>
-              <a:rPr lang="ru-RU" dirty="0"/>
-              <a:t>.</a:t>
-            </a:r>
-          </a:p>
-          <a:p>
-            <a:pPr marL="342900" indent="-342900">
-              <a:buFont typeface="+mj-lt"/>
-              <a:buAutoNum type="arabicPeriod"/>
-            </a:pPr>
-            <a:r>
-              <a:rPr lang="ru-RU" dirty="0" err="1"/>
-              <a:t>Можна</a:t>
-            </a:r>
-            <a:r>
-              <a:rPr lang="ru-RU" dirty="0"/>
-              <a:t> </a:t>
-            </a:r>
-            <a:r>
-              <a:rPr lang="ru-RU" dirty="0" err="1"/>
-              <a:t>формулювати</a:t>
-            </a:r>
-            <a:r>
-              <a:rPr lang="ru-RU" dirty="0"/>
-              <a:t> </a:t>
-            </a:r>
-            <a:r>
-              <a:rPr lang="ru-RU" dirty="0" err="1"/>
-              <a:t>регіональні</a:t>
-            </a:r>
-            <a:r>
-              <a:rPr lang="ru-RU" dirty="0"/>
-              <a:t> </a:t>
-            </a:r>
-            <a:r>
-              <a:rPr lang="ru-RU" dirty="0" err="1"/>
-              <a:t>особливості</a:t>
-            </a:r>
-            <a:r>
-              <a:rPr lang="ru-RU" dirty="0"/>
-              <a:t> </a:t>
-            </a:r>
-            <a:r>
-              <a:rPr lang="ru-RU" dirty="0" err="1"/>
-              <a:t>застосування</a:t>
-            </a:r>
-            <a:r>
-              <a:rPr lang="ru-RU" dirty="0"/>
-              <a:t> </a:t>
-            </a:r>
-            <a:r>
-              <a:rPr lang="ru-RU" dirty="0" err="1"/>
-              <a:t>покарань</a:t>
-            </a:r>
-            <a:r>
-              <a:rPr lang="ru-RU" dirty="0"/>
-              <a:t> (</a:t>
-            </a:r>
-            <a:r>
-              <a:rPr lang="ru-RU" dirty="0" err="1"/>
-              <a:t>наприклад</a:t>
-            </a:r>
-            <a:r>
-              <a:rPr lang="ru-RU" dirty="0"/>
-              <a:t>, </a:t>
-            </a:r>
-            <a:r>
-              <a:rPr lang="ru-RU" dirty="0" err="1"/>
-              <a:t>більша</a:t>
-            </a:r>
-            <a:r>
-              <a:rPr lang="ru-RU" dirty="0"/>
-              <a:t> </a:t>
-            </a:r>
-            <a:r>
-              <a:rPr lang="ru-RU" dirty="0" err="1"/>
-              <a:t>частка</a:t>
-            </a:r>
-            <a:r>
-              <a:rPr lang="ru-RU" dirty="0"/>
-              <a:t> </a:t>
-            </a:r>
-            <a:r>
-              <a:rPr lang="ru-RU" dirty="0" err="1"/>
-              <a:t>штрафів</a:t>
-            </a:r>
-            <a:r>
-              <a:rPr lang="ru-RU" dirty="0"/>
-              <a:t> </a:t>
-            </a:r>
-            <a:r>
-              <a:rPr lang="ru-RU" dirty="0" err="1"/>
-              <a:t>або</a:t>
-            </a:r>
-            <a:r>
-              <a:rPr lang="ru-RU" dirty="0"/>
-              <a:t> </a:t>
-            </a:r>
-            <a:r>
-              <a:rPr lang="ru-RU" dirty="0" err="1"/>
-              <a:t>доган</a:t>
-            </a:r>
-            <a:r>
-              <a:rPr lang="ru-RU" dirty="0"/>
-              <a:t> у </a:t>
-            </a:r>
-            <a:r>
-              <a:rPr lang="ru-RU" dirty="0" err="1"/>
-              <a:t>окремих</a:t>
-            </a:r>
-            <a:r>
-              <a:rPr lang="ru-RU" dirty="0"/>
-              <a:t> областях).</a:t>
-            </a:r>
-          </a:p>
-          <a:p>
-            <a:endParaRPr lang="uk-UA" dirty="0"/>
-          </a:p>
-          <a:p>
-            <a:pPr rtl="0"/>
-            <a:endParaRPr lang="uk-UA" dirty="0"/>
-          </a:p>
-          <a:p>
-            <a:pPr marL="342900" indent="-342900">
-              <a:buFont typeface="+mj-lt"/>
-              <a:buAutoNum type="arabicPeriod"/>
-            </a:pPr>
-            <a:endParaRPr lang="uk-UA" dirty="0">
-              <a:solidFill>
-                <a:srgbClr val="D4D4D4"/>
-              </a:solidFill>
-              <a:latin typeface="Consolas" panose="020B0609020204030204" pitchFamily="49" charset="0"/>
-            </a:endParaRPr>
-          </a:p>
-          <a:p>
-            <a:pPr marL="342900" indent="-342900">
-              <a:buFont typeface="+mj-lt"/>
-              <a:buAutoNum type="arabicPeriod"/>
-            </a:pPr>
-            <a:endParaRPr lang="uk-UA" dirty="0">
-              <a:solidFill>
-                <a:srgbClr val="D4D4D4"/>
-              </a:solidFill>
-              <a:latin typeface="Consolas" panose="020B0609020204030204" pitchFamily="49" charset="0"/>
-            </a:endParaRPr>
-          </a:p>
-          <a:p>
-            <a:pPr marL="342900" indent="-342900">
-              <a:buFont typeface="+mj-lt"/>
-              <a:buAutoNum type="arabicPeriod"/>
-            </a:pPr>
-            <a:endParaRPr lang="ru-RU" b="0" dirty="0">
-              <a:solidFill>
-                <a:srgbClr val="D4D4D4"/>
-              </a:solidFill>
-              <a:effectLst/>
-              <a:latin typeface="Consolas" panose="020B0609020204030204" pitchFamily="49" charset="0"/>
-            </a:endParaRPr>
-          </a:p>
-          <a:p>
-            <a:pPr marL="342900" indent="-342900">
-              <a:buFont typeface="+mj-lt"/>
-              <a:buAutoNum type="arabicPeriod"/>
-            </a:pPr>
-            <a:endParaRPr lang="uk-UA" b="0" dirty="0">
-              <a:solidFill>
-                <a:srgbClr val="D4D4D4"/>
-              </a:solidFill>
-              <a:effectLst/>
-              <a:latin typeface="Consolas" panose="020B0609020204030204" pitchFamily="49" charset="0"/>
-            </a:endParaRPr>
-          </a:p>
-          <a:p>
-            <a:pPr marL="342900" indent="-342900">
-              <a:buFont typeface="+mj-lt"/>
-              <a:buAutoNum type="arabicPeriod"/>
-            </a:pPr>
-            <a:endParaRPr lang="uk-UA" dirty="0"/>
+              <a:rPr lang="uk-UA" sz="1600" dirty="0"/>
+              <a:t>Аналіз розподілу санкцій за регіонами дозволяє виявити відмінності у практиці застосування покарань. У деяких областях може спостерігатися більша частка штрафів або дисциплінарних стягнень, що може відображати особливості судової практики або структуру правопорушень.</a:t>
+            </a:r>
           </a:p>
         </p:txBody>
       </p:sp>
@@ -4466,7 +4344,7 @@
 </p:sld>
 </file>
 
-<file path=ppt/slides/slide14.xml><?xml version="1.0" encoding="utf-8"?>
+<file path=ppt/slides/slide15.xml><?xml version="1.0" encoding="utf-8"?>
 <p:sld xmlns:a="http://schemas.openxmlformats.org/drawingml/2006/main" xmlns:r="http://schemas.openxmlformats.org/officeDocument/2006/relationships" xmlns:p="http://schemas.openxmlformats.org/presentationml/2006/main">
   <p:cSld>
     <p:spTree>
@@ -5855,7 +5733,7 @@
         </p:blipFill>
         <p:spPr>
           <a:xfrm>
-            <a:off x="2447384" y="1690688"/>
+            <a:off x="838200" y="1690688"/>
             <a:ext cx="6715666" cy="4430360"/>
           </a:xfrm>
           <a:prstGeom prst="rect">
@@ -5863,6 +5741,42 @@
           </a:prstGeom>
         </p:spPr>
       </p:pic>
+      <p:sp>
+        <p:nvSpPr>
+          <p:cNvPr id="3" name="TextBox 2">
+            <a:extLst>
+              <a:ext uri="{FF2B5EF4-FFF2-40B4-BE49-F238E27FC236}">
+                <a16:creationId xmlns:a16="http://schemas.microsoft.com/office/drawing/2014/main" id="{A83BCD19-DD1D-798C-842D-3B197BC81905}"/>
+              </a:ext>
+            </a:extLst>
+          </p:cNvPr>
+          <p:cNvSpPr txBox="1"/>
+          <p:nvPr/>
+        </p:nvSpPr>
+        <p:spPr>
+          <a:xfrm>
+            <a:off x="7848600" y="2828835"/>
+            <a:ext cx="3867150" cy="1200329"/>
+          </a:xfrm>
+          <a:prstGeom prst="rect">
+            <a:avLst/>
+          </a:prstGeom>
+          <a:noFill/>
+        </p:spPr>
+        <p:txBody>
+          <a:bodyPr wrap="square" rtlCol="0">
+            <a:spAutoFit/>
+          </a:bodyPr>
+          <a:lstStyle/>
+          <a:p>
+            <a:pPr algn="just"/>
+            <a:r>
+              <a:rPr lang="uk-UA" dirty="0"/>
+              <a:t>Реєстр складається із справ фізичних осіб. Випадок із 1 юридичною особою розглядається як виключення</a:t>
+            </a:r>
+          </a:p>
+        </p:txBody>
+      </p:sp>
     </p:spTree>
     <p:extLst>
       <p:ext uri="{BB962C8B-B14F-4D97-AF65-F5344CB8AC3E}">
@@ -5943,38 +5857,8 @@
         </p:blipFill>
         <p:spPr>
           <a:xfrm>
-            <a:off x="1145890" y="1604385"/>
-            <a:ext cx="9900219" cy="4888490"/>
-          </a:xfrm>
-          <a:prstGeom prst="rect">
-            <a:avLst/>
-          </a:prstGeom>
-        </p:spPr>
-      </p:pic>
-      <p:pic>
-        <p:nvPicPr>
-          <p:cNvPr id="8" name="Рисунок 7">
-            <a:extLst>
-              <a:ext uri="{FF2B5EF4-FFF2-40B4-BE49-F238E27FC236}">
-                <a16:creationId xmlns:a16="http://schemas.microsoft.com/office/drawing/2014/main" id="{F040BE9F-5EDF-3E7F-F9B5-B6351B505A13}"/>
-              </a:ext>
-            </a:extLst>
-          </p:cNvPr>
-          <p:cNvPicPr>
-            <a:picLocks noChangeAspect="1"/>
-          </p:cNvPicPr>
-          <p:nvPr/>
-        </p:nvPicPr>
-        <p:blipFill>
-          <a:blip r:embed="rId3"/>
-          <a:stretch>
-            <a:fillRect/>
-          </a:stretch>
-        </p:blipFill>
-        <p:spPr>
-          <a:xfrm>
-            <a:off x="3384681" y="1604385"/>
-            <a:ext cx="5422638" cy="4453405"/>
+            <a:off x="1171575" y="1556760"/>
+            <a:ext cx="9848849" cy="4863125"/>
           </a:xfrm>
           <a:prstGeom prst="rect">
             <a:avLst/>
@@ -6003,6 +5887,9 @@
                     <p:cTn id="3" fill="hold">
                       <p:stCondLst>
                         <p:cond delay="indefinite"/>
+                        <p:cond evt="onBegin" delay="0">
+                          <p:tn val="2"/>
+                        </p:cond>
                       </p:stCondLst>
                       <p:childTnLst>
                         <p:par>
@@ -6012,7 +5899,7 @@
                             </p:stCondLst>
                             <p:childTnLst>
                               <p:par>
-                                <p:cTn id="5" presetID="1" presetClass="entr" presetSubtype="0" fill="hold" nodeType="clickEffect">
+                                <p:cTn id="5" presetID="1" presetClass="exit" presetSubtype="0" fill="hold" nodeType="withEffect">
                                   <p:stCondLst>
                                     <p:cond delay="0"/>
                                   </p:stCondLst>
@@ -6020,33 +5907,6 @@
                                     <p:set>
                                       <p:cBhvr>
                                         <p:cTn id="6" dur="1" fill="hold">
-                                          <p:stCondLst>
-                                            <p:cond delay="0"/>
-                                          </p:stCondLst>
-                                        </p:cTn>
-                                        <p:tgtEl>
-                                          <p:spTgt spid="8"/>
-                                        </p:tgtEl>
-                                        <p:attrNameLst>
-                                          <p:attrName>style.visibility</p:attrName>
-                                        </p:attrNameLst>
-                                      </p:cBhvr>
-                                      <p:to>
-                                        <p:strVal val="visible"/>
-                                      </p:to>
-                                    </p:set>
-                                  </p:childTnLst>
-                                </p:cTn>
-                              </p:par>
-                              <p:par>
-                                <p:cTn id="7" presetID="1" presetClass="exit" presetSubtype="0" fill="hold" nodeType="withEffect">
-                                  <p:stCondLst>
-                                    <p:cond delay="0"/>
-                                  </p:stCondLst>
-                                  <p:childTnLst>
-                                    <p:set>
-                                      <p:cBhvr>
-                                        <p:cTn id="8" dur="1" fill="hold">
                                           <p:stCondLst>
                                             <p:cond delay="0"/>
                                           </p:stCondLst>
@@ -6118,7 +5978,7 @@
           <p:cNvPr id="2" name="Заголовок 1">
             <a:extLst>
               <a:ext uri="{FF2B5EF4-FFF2-40B4-BE49-F238E27FC236}">
-                <a16:creationId xmlns:a16="http://schemas.microsoft.com/office/drawing/2014/main" id="{A65D7109-26C6-D14E-4E55-BFD9660D68A3}"/>
+                <a16:creationId xmlns:a16="http://schemas.microsoft.com/office/drawing/2014/main" id="{9CC9FCDC-747A-77AD-0E7A-533CB9B902C0}"/>
               </a:ext>
             </a:extLst>
           </p:cNvPr>
@@ -6136,17 +5996,17 @@
           <a:p>
             <a:r>
               <a:rPr lang="uk-UA" dirty="0"/>
-              <a:t>Найчастіші статті кодексу</a:t>
+              <a:t>Розподіл за видами покарання</a:t>
             </a:r>
           </a:p>
         </p:txBody>
       </p:sp>
       <p:pic>
         <p:nvPicPr>
-          <p:cNvPr id="5" name="Рисунок 4">
-            <a:extLst>
-              <a:ext uri="{FF2B5EF4-FFF2-40B4-BE49-F238E27FC236}">
-                <a16:creationId xmlns:a16="http://schemas.microsoft.com/office/drawing/2014/main" id="{A208B705-B306-FD93-981D-5846959BDFC3}"/>
+          <p:cNvPr id="8" name="Рисунок 7">
+            <a:extLst>
+              <a:ext uri="{FF2B5EF4-FFF2-40B4-BE49-F238E27FC236}">
+                <a16:creationId xmlns:a16="http://schemas.microsoft.com/office/drawing/2014/main" id="{F040BE9F-5EDF-3E7F-F9B5-B6351B505A13}"/>
               </a:ext>
             </a:extLst>
           </p:cNvPr>
@@ -6163,24 +6023,165 @@
         </p:blipFill>
         <p:spPr>
           <a:xfrm>
-            <a:off x="0" y="1690688"/>
-            <a:ext cx="12192000" cy="3850879"/>
+            <a:off x="6203874" y="1690688"/>
+            <a:ext cx="5422638" cy="4453405"/>
           </a:xfrm>
           <a:prstGeom prst="rect">
             <a:avLst/>
           </a:prstGeom>
         </p:spPr>
       </p:pic>
+      <p:sp>
+        <p:nvSpPr>
+          <p:cNvPr id="3" name="TextBox 2">
+            <a:extLst>
+              <a:ext uri="{FF2B5EF4-FFF2-40B4-BE49-F238E27FC236}">
+                <a16:creationId xmlns:a16="http://schemas.microsoft.com/office/drawing/2014/main" id="{49FE34F5-8BE1-9F77-0202-668ADB93E6BD}"/>
+              </a:ext>
+            </a:extLst>
+          </p:cNvPr>
+          <p:cNvSpPr txBox="1"/>
+          <p:nvPr/>
+        </p:nvSpPr>
+        <p:spPr>
+          <a:xfrm>
+            <a:off x="565488" y="2242999"/>
+            <a:ext cx="4901862" cy="3139321"/>
+          </a:xfrm>
+          <a:prstGeom prst="rect">
+            <a:avLst/>
+          </a:prstGeom>
+          <a:noFill/>
+        </p:spPr>
+        <p:txBody>
+          <a:bodyPr wrap="square" rtlCol="0">
+            <a:spAutoFit/>
+          </a:bodyPr>
+          <a:lstStyle/>
+          <a:p>
+            <a:pPr algn="just"/>
+            <a:r>
+              <a:rPr lang="uk-UA" dirty="0"/>
+              <a:t>Основним видом покарання являється Штраф. Його доля складає 56,5% від загальної кількості всіх справ реєстру.</a:t>
+            </a:r>
+          </a:p>
+          <a:p>
+            <a:pPr algn="just"/>
+            <a:endParaRPr lang="uk-UA" dirty="0"/>
+          </a:p>
+          <a:p>
+            <a:pPr algn="just"/>
+            <a:r>
+              <a:rPr lang="uk-UA" dirty="0"/>
+              <a:t>На другому місці знаходяться випадки без зазначеного виду покарання, але із вказаною датою початку дії </a:t>
+            </a:r>
+            <a:r>
+              <a:rPr lang="uk-UA" dirty="0" err="1"/>
+              <a:t>вироку</a:t>
+            </a:r>
+            <a:r>
+              <a:rPr lang="uk-UA" dirty="0"/>
+              <a:t> із долею 13,7%</a:t>
+            </a:r>
+          </a:p>
+          <a:p>
+            <a:pPr algn="just"/>
+            <a:endParaRPr lang="uk-UA" dirty="0"/>
+          </a:p>
+          <a:p>
+            <a:pPr algn="just"/>
+            <a:r>
+              <a:rPr lang="uk-UA" dirty="0"/>
+              <a:t>На третьому – позбавлення волі із долею 13,1%</a:t>
+            </a:r>
+          </a:p>
+        </p:txBody>
+      </p:sp>
     </p:spTree>
     <p:extLst>
       <p:ext uri="{BB962C8B-B14F-4D97-AF65-F5344CB8AC3E}">
-        <p14:creationId xmlns:p14="http://schemas.microsoft.com/office/powerpoint/2010/main" val="3554965421"/>
+        <p14:creationId xmlns:p14="http://schemas.microsoft.com/office/powerpoint/2010/main" val="3391036140"/>
       </p:ext>
     </p:extLst>
   </p:cSld>
   <p:clrMapOvr>
     <a:masterClrMapping/>
   </p:clrMapOvr>
+  <p:timing>
+    <p:tnLst>
+      <p:par>
+        <p:cTn id="1" dur="indefinite" restart="never" nodeType="tmRoot">
+          <p:childTnLst>
+            <p:seq concurrent="1" nextAc="seek">
+              <p:cTn id="2" dur="indefinite" nodeType="mainSeq">
+                <p:childTnLst>
+                  <p:par>
+                    <p:cTn id="3" fill="hold">
+                      <p:stCondLst>
+                        <p:cond delay="indefinite"/>
+                      </p:stCondLst>
+                      <p:childTnLst>
+                        <p:par>
+                          <p:cTn id="4" fill="hold">
+                            <p:stCondLst>
+                              <p:cond delay="0"/>
+                            </p:stCondLst>
+                            <p:childTnLst>
+                              <p:par>
+                                <p:cTn id="5" presetID="1" presetClass="entr" presetSubtype="0" fill="hold" nodeType="clickEffect">
+                                  <p:stCondLst>
+                                    <p:cond delay="0"/>
+                                  </p:stCondLst>
+                                  <p:childTnLst>
+                                    <p:set>
+                                      <p:cBhvr>
+                                        <p:cTn id="6" dur="1" fill="hold">
+                                          <p:stCondLst>
+                                            <p:cond delay="0"/>
+                                          </p:stCondLst>
+                                        </p:cTn>
+                                        <p:tgtEl>
+                                          <p:spTgt spid="8"/>
+                                        </p:tgtEl>
+                                        <p:attrNameLst>
+                                          <p:attrName>style.visibility</p:attrName>
+                                        </p:attrNameLst>
+                                      </p:cBhvr>
+                                      <p:to>
+                                        <p:strVal val="visible"/>
+                                      </p:to>
+                                    </p:set>
+                                  </p:childTnLst>
+                                </p:cTn>
+                              </p:par>
+                            </p:childTnLst>
+                          </p:cTn>
+                        </p:par>
+                      </p:childTnLst>
+                    </p:cTn>
+                  </p:par>
+                </p:childTnLst>
+              </p:cTn>
+              <p:prevCondLst>
+                <p:cond evt="onPrev" delay="0">
+                  <p:tgtEl>
+                    <p:sldTgt/>
+                  </p:tgtEl>
+                </p:cond>
+              </p:prevCondLst>
+              <p:nextCondLst>
+                <p:cond evt="onNext" delay="0">
+                  <p:tgtEl>
+                    <p:sldTgt/>
+                  </p:tgtEl>
+                </p:cond>
+              </p:nextCondLst>
+            </p:seq>
+          </p:childTnLst>
+        </p:cTn>
+      </p:par>
+    </p:tnLst>
+  </p:timing>
 </p:sld>
 </file>
 
@@ -6206,7 +6207,7 @@
           <p:cNvPr id="2" name="Заголовок 1">
             <a:extLst>
               <a:ext uri="{FF2B5EF4-FFF2-40B4-BE49-F238E27FC236}">
-                <a16:creationId xmlns:a16="http://schemas.microsoft.com/office/drawing/2014/main" id="{C41A9976-3BAC-7880-A7F3-793A2B037495}"/>
+                <a16:creationId xmlns:a16="http://schemas.microsoft.com/office/drawing/2014/main" id="{A65D7109-26C6-D14E-4E55-BFD9660D68A3}"/>
               </a:ext>
             </a:extLst>
           </p:cNvPr>
@@ -6224,7 +6225,7 @@
           <a:p>
             <a:r>
               <a:rPr lang="uk-UA" dirty="0"/>
-              <a:t>Розподіл за регіонами</a:t>
+              <a:t>Найчастіші статті кодексу</a:t>
             </a:r>
           </a:p>
         </p:txBody>
@@ -6234,7 +6235,7 @@
           <p:cNvPr id="5" name="Рисунок 4">
             <a:extLst>
               <a:ext uri="{FF2B5EF4-FFF2-40B4-BE49-F238E27FC236}">
-                <a16:creationId xmlns:a16="http://schemas.microsoft.com/office/drawing/2014/main" id="{EF53AAD1-B8D6-5B70-A4DD-A9EAC9F351A5}"/>
+                <a16:creationId xmlns:a16="http://schemas.microsoft.com/office/drawing/2014/main" id="{A208B705-B306-FD93-981D-5846959BDFC3}"/>
               </a:ext>
             </a:extLst>
           </p:cNvPr>
@@ -6251,48 +6252,334 @@
         </p:blipFill>
         <p:spPr>
           <a:xfrm>
-            <a:off x="838200" y="1376460"/>
-            <a:ext cx="6201145" cy="5116415"/>
+            <a:off x="583406" y="1357314"/>
+            <a:ext cx="11025188" cy="3482338"/>
           </a:xfrm>
           <a:prstGeom prst="rect">
             <a:avLst/>
           </a:prstGeom>
         </p:spPr>
       </p:pic>
-      <p:pic>
-        <p:nvPicPr>
-          <p:cNvPr id="9" name="Рисунок 8">
-            <a:extLst>
-              <a:ext uri="{FF2B5EF4-FFF2-40B4-BE49-F238E27FC236}">
-                <a16:creationId xmlns:a16="http://schemas.microsoft.com/office/drawing/2014/main" id="{625ABCF9-7FBB-F1B1-414B-90AF28D150B6}"/>
-              </a:ext>
-            </a:extLst>
-          </p:cNvPr>
-          <p:cNvPicPr>
-            <a:picLocks noChangeAspect="1"/>
-          </p:cNvPicPr>
+      <p:sp>
+        <p:nvSpPr>
+          <p:cNvPr id="3" name="TextBox 2">
+            <a:extLst>
+              <a:ext uri="{FF2B5EF4-FFF2-40B4-BE49-F238E27FC236}">
+                <a16:creationId xmlns:a16="http://schemas.microsoft.com/office/drawing/2014/main" id="{EF708627-C1F8-5337-698A-C474B53840FC}"/>
+              </a:ext>
+            </a:extLst>
+          </p:cNvPr>
+          <p:cNvSpPr txBox="1"/>
           <p:nvPr/>
-        </p:nvPicPr>
-        <p:blipFill>
-          <a:blip r:embed="rId3"/>
-          <a:stretch>
-            <a:fillRect/>
-          </a:stretch>
-        </p:blipFill>
+        </p:nvSpPr>
         <p:spPr>
           <a:xfrm>
-            <a:off x="7039345" y="2143775"/>
-            <a:ext cx="4408827" cy="3581783"/>
+            <a:off x="336888" y="4742407"/>
+            <a:ext cx="6302037" cy="1815882"/>
           </a:xfrm>
           <a:prstGeom prst="rect">
             <a:avLst/>
           </a:prstGeom>
+          <a:noFill/>
         </p:spPr>
-      </p:pic>
+        <p:txBody>
+          <a:bodyPr wrap="square" rtlCol="0">
+            <a:spAutoFit/>
+          </a:bodyPr>
+          <a:lstStyle/>
+          <a:p>
+            <a:pPr algn="just"/>
+            <a:r>
+              <a:rPr lang="uk-UA" sz="1600" dirty="0"/>
+              <a:t>Найчастіше фігурують статті пропозиція та прийняття пропозиції, обіцянки або надання/одержання неправомірної вигоди службовою особою.</a:t>
+            </a:r>
+          </a:p>
+          <a:p>
+            <a:pPr algn="just"/>
+            <a:endParaRPr lang="uk-UA" sz="1600" dirty="0"/>
+          </a:p>
+          <a:p>
+            <a:pPr algn="just"/>
+            <a:r>
+              <a:rPr lang="uk-UA" sz="1600" dirty="0"/>
+              <a:t>Крім того часто зустрічається порушення вимог фінансового контролю. Трохи рідше привласнення, розтрата майна або заволодіння ним шляхом зловживання службовим становищем.</a:t>
+            </a:r>
+          </a:p>
+        </p:txBody>
+      </p:sp>
+      <p:sp>
+        <p:nvSpPr>
+          <p:cNvPr id="4" name="Rectangle 1">
+            <a:extLst>
+              <a:ext uri="{FF2B5EF4-FFF2-40B4-BE49-F238E27FC236}">
+                <a16:creationId xmlns:a16="http://schemas.microsoft.com/office/drawing/2014/main" id="{3BA4F16B-7CDF-31EE-FA3B-990609ED2530}"/>
+              </a:ext>
+            </a:extLst>
+          </p:cNvPr>
+          <p:cNvSpPr>
+            <a:spLocks noChangeArrowheads="1"/>
+          </p:cNvSpPr>
+          <p:nvPr/>
+        </p:nvSpPr>
+        <p:spPr bwMode="auto">
+          <a:xfrm>
+            <a:off x="6877049" y="4947374"/>
+            <a:ext cx="4731545" cy="1600438"/>
+          </a:xfrm>
+          <a:prstGeom prst="rect">
+            <a:avLst/>
+          </a:prstGeom>
+          <a:ln/>
+        </p:spPr>
+        <p:style>
+          <a:lnRef idx="2">
+            <a:schemeClr val="accent1"/>
+          </a:lnRef>
+          <a:fillRef idx="1">
+            <a:schemeClr val="lt1"/>
+          </a:fillRef>
+          <a:effectRef idx="0">
+            <a:schemeClr val="accent1"/>
+          </a:effectRef>
+          <a:fontRef idx="minor">
+            <a:schemeClr val="dk1"/>
+          </a:fontRef>
+        </p:style>
+        <p:txBody>
+          <a:bodyPr vert="horz" wrap="square" lIns="91440" tIns="45720" rIns="91440" bIns="45720" numCol="1" anchor="ctr" anchorCtr="0" compatLnSpc="1">
+            <a:prstTxWarp prst="textNoShape">
+              <a:avLst/>
+            </a:prstTxWarp>
+            <a:spAutoFit/>
+          </a:bodyPr>
+          <a:lstStyle/>
+          <a:p>
+            <a:pPr marL="0" marR="0" lvl="0" indent="0" algn="just" defTabSz="914400" rtl="0" eaLnBrk="0" fontAlgn="base" latinLnBrk="0" hangingPunct="0">
+              <a:lnSpc>
+                <a:spcPct val="100000"/>
+              </a:lnSpc>
+              <a:spcBef>
+                <a:spcPct val="0"/>
+              </a:spcBef>
+              <a:spcAft>
+                <a:spcPct val="0"/>
+              </a:spcAft>
+              <a:buClrTx/>
+              <a:buSzTx/>
+              <a:buFontTx/>
+              <a:buChar char="•"/>
+              <a:tabLst/>
+            </a:pPr>
+            <a:r>
+              <a:rPr kumimoji="0" lang="uk-UA" altLang="uk-UA" sz="1400" i="1" u="none" strike="noStrike" cap="none" normalizeH="0" baseline="0" dirty="0">
+                <a:ln>
+                  <a:noFill/>
+                </a:ln>
+                <a:solidFill>
+                  <a:schemeClr val="tx1"/>
+                </a:solidFill>
+                <a:effectLst>
+                  <a:outerShdw blurRad="38100" dist="38100" dir="2700000" algn="tl">
+                    <a:srgbClr val="000000">
+                      <a:alpha val="43137"/>
+                    </a:srgbClr>
+                  </a:outerShdw>
+                </a:effectLst>
+              </a:rPr>
+              <a:t>Найпоширеніша корупція </a:t>
+            </a:r>
+            <a:r>
+              <a:rPr lang="uk-UA" altLang="uk-UA" sz="1400" i="1" dirty="0">
+                <a:effectLst>
+                  <a:outerShdw blurRad="38100" dist="38100" dir="2700000" algn="tl">
+                    <a:srgbClr val="000000">
+                      <a:alpha val="43137"/>
+                    </a:srgbClr>
+                  </a:outerShdw>
+                </a:effectLst>
+              </a:rPr>
+              <a:t>-</a:t>
+            </a:r>
+            <a:r>
+              <a:rPr kumimoji="0" lang="uk-UA" altLang="uk-UA" sz="1400" i="1" u="none" strike="noStrike" cap="none" normalizeH="0" baseline="0" dirty="0">
+                <a:ln>
+                  <a:noFill/>
+                </a:ln>
+                <a:solidFill>
+                  <a:schemeClr val="tx1"/>
+                </a:solidFill>
+                <a:effectLst>
+                  <a:outerShdw blurRad="38100" dist="38100" dir="2700000" algn="tl">
+                    <a:srgbClr val="000000">
+                      <a:alpha val="43137"/>
+                    </a:srgbClr>
+                  </a:outerShdw>
+                </a:effectLst>
+              </a:rPr>
+              <a:t> хабарництво.</a:t>
+            </a:r>
+          </a:p>
+          <a:p>
+            <a:pPr marL="0" marR="0" lvl="0" indent="0" algn="just" defTabSz="914400" rtl="0" eaLnBrk="0" fontAlgn="base" latinLnBrk="0" hangingPunct="0">
+              <a:lnSpc>
+                <a:spcPct val="100000"/>
+              </a:lnSpc>
+              <a:spcBef>
+                <a:spcPct val="0"/>
+              </a:spcBef>
+              <a:spcAft>
+                <a:spcPct val="0"/>
+              </a:spcAft>
+              <a:buClrTx/>
+              <a:buSzTx/>
+              <a:buFontTx/>
+              <a:buChar char="•"/>
+              <a:tabLst/>
+            </a:pPr>
+            <a:r>
+              <a:rPr kumimoji="0" lang="uk-UA" altLang="uk-UA" sz="1400" i="1" u="none" strike="noStrike" cap="none" normalizeH="0" baseline="0" dirty="0">
+                <a:ln>
+                  <a:noFill/>
+                </a:ln>
+                <a:solidFill>
+                  <a:schemeClr val="tx1"/>
+                </a:solidFill>
+                <a:effectLst>
+                  <a:outerShdw blurRad="38100" dist="38100" dir="2700000" algn="tl">
+                    <a:srgbClr val="000000">
+                      <a:alpha val="43137"/>
+                    </a:srgbClr>
+                  </a:outerShdw>
+                </a:effectLst>
+              </a:rPr>
+              <a:t>Система фінансового декларування активно генерує справи.</a:t>
+            </a:r>
+          </a:p>
+          <a:p>
+            <a:pPr marL="0" marR="0" lvl="0" indent="0" algn="just" defTabSz="914400" rtl="0" eaLnBrk="0" fontAlgn="base" latinLnBrk="0" hangingPunct="0">
+              <a:lnSpc>
+                <a:spcPct val="100000"/>
+              </a:lnSpc>
+              <a:spcBef>
+                <a:spcPct val="0"/>
+              </a:spcBef>
+              <a:spcAft>
+                <a:spcPct val="0"/>
+              </a:spcAft>
+              <a:buClrTx/>
+              <a:buSzTx/>
+              <a:buFontTx/>
+              <a:buChar char="•"/>
+              <a:tabLst/>
+            </a:pPr>
+            <a:r>
+              <a:rPr kumimoji="0" lang="uk-UA" altLang="uk-UA" sz="1400" i="1" u="none" strike="noStrike" cap="none" normalizeH="0" baseline="0" dirty="0">
+                <a:ln>
+                  <a:noFill/>
+                </a:ln>
+                <a:solidFill>
+                  <a:schemeClr val="tx1"/>
+                </a:solidFill>
+                <a:effectLst>
+                  <a:outerShdw blurRad="38100" dist="38100" dir="2700000" algn="tl">
+                    <a:srgbClr val="000000">
+                      <a:alpha val="43137"/>
+                    </a:srgbClr>
+                  </a:outerShdw>
+                </a:effectLst>
+              </a:rPr>
+              <a:t>Складні економічні злочини трапляються рідше в реєстрі, бо їх важче довести.</a:t>
+            </a:r>
+          </a:p>
+          <a:p>
+            <a:pPr marL="0" marR="0" lvl="0" indent="0" algn="just" defTabSz="914400" rtl="0" eaLnBrk="0" fontAlgn="base" latinLnBrk="0" hangingPunct="0">
+              <a:lnSpc>
+                <a:spcPct val="100000"/>
+              </a:lnSpc>
+              <a:spcBef>
+                <a:spcPct val="0"/>
+              </a:spcBef>
+              <a:spcAft>
+                <a:spcPct val="0"/>
+              </a:spcAft>
+              <a:buClrTx/>
+              <a:buSzTx/>
+              <a:buFontTx/>
+              <a:buChar char="•"/>
+              <a:tabLst/>
+            </a:pPr>
+            <a:r>
+              <a:rPr kumimoji="0" lang="uk-UA" altLang="uk-UA" sz="1400" i="1" u="none" strike="noStrike" cap="none" normalizeH="0" baseline="0" dirty="0">
+                <a:ln>
+                  <a:noFill/>
+                </a:ln>
+                <a:solidFill>
+                  <a:schemeClr val="tx1"/>
+                </a:solidFill>
+                <a:effectLst>
+                  <a:outerShdw blurRad="38100" dist="38100" dir="2700000" algn="tl">
+                    <a:srgbClr val="000000">
+                      <a:alpha val="43137"/>
+                    </a:srgbClr>
+                  </a:outerShdw>
+                </a:effectLst>
+              </a:rPr>
+              <a:t>Судова статистика більше відображає масову дрібну корупцію, ніж великі схеми.</a:t>
+            </a:r>
+          </a:p>
+        </p:txBody>
+      </p:sp>
+      <p:sp>
+        <p:nvSpPr>
+          <p:cNvPr id="6" name="Кнопка дії: довідка 5">
+            <a:hlinkClick r:id="" action="ppaction://noaction" highlightClick="1"/>
+            <a:extLst>
+              <a:ext uri="{FF2B5EF4-FFF2-40B4-BE49-F238E27FC236}">
+                <a16:creationId xmlns:a16="http://schemas.microsoft.com/office/drawing/2014/main" id="{1D242AAF-6348-47D3-AF9A-C017E93A71E9}"/>
+              </a:ext>
+            </a:extLst>
+          </p:cNvPr>
+          <p:cNvSpPr/>
+          <p:nvPr/>
+        </p:nvSpPr>
+        <p:spPr>
+          <a:xfrm>
+            <a:off x="11353800" y="4947375"/>
+            <a:ext cx="254794" cy="254794"/>
+          </a:xfrm>
+          <a:prstGeom prst="actionButtonHelp">
+            <a:avLst/>
+          </a:prstGeom>
+        </p:spPr>
+        <p:style>
+          <a:lnRef idx="2">
+            <a:schemeClr val="accent1">
+              <a:shade val="15000"/>
+            </a:schemeClr>
+          </a:lnRef>
+          <a:fillRef idx="1">
+            <a:schemeClr val="accent1"/>
+          </a:fillRef>
+          <a:effectRef idx="0">
+            <a:schemeClr val="accent1"/>
+          </a:effectRef>
+          <a:fontRef idx="minor">
+            <a:schemeClr val="lt1"/>
+          </a:fontRef>
+        </p:style>
+        <p:txBody>
+          <a:bodyPr rtlCol="0" anchor="ctr"/>
+          <a:lstStyle/>
+          <a:p>
+            <a:pPr algn="ctr"/>
+            <a:endParaRPr lang="uk-UA"/>
+          </a:p>
+        </p:txBody>
+      </p:sp>
     </p:spTree>
     <p:extLst>
       <p:ext uri="{BB962C8B-B14F-4D97-AF65-F5344CB8AC3E}">
-        <p14:creationId xmlns:p14="http://schemas.microsoft.com/office/powerpoint/2010/main" val="1598815601"/>
+        <p14:creationId xmlns:p14="http://schemas.microsoft.com/office/powerpoint/2010/main" val="3554965421"/>
       </p:ext>
     </p:extLst>
   </p:cSld>
